--- a/docs/智鉴AI-演示PPT.pptx
+++ b/docs/智鉴AI-演示PPT.pptx
@@ -5313,7 +5313,7 @@
                             <a:srgbClr val="222222"/>
                           </a:solidFill>
                         </a:rPr>
-                        <a:t>项目定位 + 运行模式徽标 + 七个能力徽标 + 一键演示按钮</a:t>
+                        <a:t>项目定位 + 运行模式徽标 + 七个能力徽标 + 快速体验（内置样例）按钮</a:t>
                       </a:r>
                     </a:p>
                   </a:txBody>
@@ -5366,7 +5366,7 @@
                             <a:srgbClr val="222222"/>
                           </a:solidFill>
                         </a:rPr>
-                        <a:t>4 个示例按钮 + 输入框 + 运行前预估 + 开始检测</a:t>
+                        <a:t>4 个示例按钮 + 输入框 + 运行前预估 + 开始核验</a:t>
                       </a:r>
                     </a:p>
                   </a:txBody>
@@ -5578,7 +5578,7 @@
                             <a:srgbClr val="222222"/>
                           </a:solidFill>
                         </a:rPr>
-                        <a:t>五项检查（含 ❌）+「未采用」标记 + 复核者身份</a:t>
+                        <a:t>五项检查（含未通过）+「未采用」标记 + 复核者身份</a:t>
                       </a:r>
                     </a:p>
                   </a:txBody>
@@ -6640,7 +6640,7 @@
                   <a:srgbClr val="7A4500"/>
                 </a:solidFill>
               </a:rPr>
-              <a:t>📷 可插入截图（首页）：项目定位 + 运行模式徽标「多模型协同」+ 七个能力徽标 + 「一键演示」按钮</a:t>
+              <a:t>📷 可插入截图（首页）：项目定位 + 运行模式徽标「多模型协同」+ 七个能力徽标 + 「快速体验」按钮</a:t>
             </a:r>
           </a:p>
         </p:txBody>
@@ -8548,8 +8548,8 @@
                 </a:solidFill>
               </a:rPr>
               <a:t>📷 建议插入 4 张截图，每幕一张：
-① 工作台输入区（含 4 个示例按钮 + 运行前预估）　② 报告页主张卡片（原文高亮 + 命中规则 + 可点击证据）
-③ 修正建议与独立复核区（五项检查、含 ❌ 与「未采用」标记）　④ 评测页指标卡片 + 混淆矩阵 + 失败案例</a:t>
+① 工作台输入区（含示例按钮、输入框与运行前预估）　② 报告页主张卡片（原文高亮 + 命中规则 + 可点击证据）
+③ 修正建议与独立复核区（五项检查、含 ❌ 与「未采用」标记）　④ 评测页指标卡片 + 混淆矩阵 + 失败案例；⑤ 报告页证据链与共识程度标识</a:t>
             </a:r>
           </a:p>
         </p:txBody>

--- a/docs/智鉴AI-演示PPT.pptx
+++ b/docs/智鉴AI-演示PPT.pptx
@@ -3241,7 +3241,7 @@
                   <a:srgbClr val="5F6B7A"/>
                 </a:solidFill>
               </a:rPr>
-              <a:t>参赛作品演示　|　阶段 0–7 全部完成　|　237 项自动化测试　|　20 条人工确认标注集上的真实评测</a:t>
+              <a:t>参赛作品演示　|　阶段 0–7 全部完成　|　242 项自动化测试　|　100 条标注集上的三基线对照实验</a:t>
             </a:r>
           </a:p>
         </p:txBody>
@@ -3750,8 +3750,8 @@
                   <a:srgbClr val="7A4500"/>
                 </a:solidFill>
               </a:rPr>
-              <a:t>📷 截图位（评测页）：指标卡片（含误报率 10%）+ 混淆矩阵 + 「失败案例」列表 + 「实验说明与局限」
-说明话术：我们最看重的不是精确率，而是误报率——一个总说「这可能有问」的系统在评测里会很漂亮，但没人敢用。</a:t>
+              <a:t>📷 截图位（评测页）：三基线指标卡片 + 混淆矩阵 + 失败案例列表 + 实验说明与局限。
+说明话术：我们最看重的不是精确率，而是误报率——直接问模型会把 44.9% 的正确内容判成有问题，而本方法压到 2.0%。</a:t>
             </a:r>
           </a:p>
         </p:txBody>
@@ -3913,7 +3913,7 @@
                   <a:srgbClr val="222222"/>
                 </a:solidFill>
               </a:rPr>
-              <a:t>构造类用例（证据不足、文内矛盾）的真值来自文本自身。测试集 20 条，覆盖 7 类，每类 1–3 条。</a:t>
+              <a:t>构造类用例（证据不足、文内矛盾）的真值来自文本自身。测试集 100 条，覆盖 7 类，每类 14–15 条。</a:t>
             </a:r>
           </a:p>
           <a:p>
@@ -4003,7 +4003,7 @@
                   <a:srgbClr val="222222"/>
                 </a:solidFill>
               </a:rPr>
-              <a:t>③ 样本量 20 条，按类别分组后每类仅 1–3 条，属于初步结果，不足以支撑统计显著性。</a:t>
+              <a:t>③ 样本量 100 条（每类 14–15 条）；新增 80 条为口头确认，仍是自建测试集，结论应表述为初步结果。</a:t>
             </a:r>
           </a:p>
         </p:txBody>
@@ -4692,7 +4692,7 @@
                   <a:srgbClr val="222222"/>
                 </a:solidFill>
               </a:rPr>
-              <a:t>· B0 基线（让原模型自检）未实现</a:t>
+              <a:t>· 只读到摘要，不通读全文；中文文献与非学术事实无法核验</a:t>
             </a:r>
           </a:p>
           <a:p>
@@ -4707,7 +4707,7 @@
                   <a:srgbClr val="222222"/>
                 </a:solidFill>
               </a:rPr>
-              <a:t>· 测试集 20 条、每类 1–3 条，样本量不足</a:t>
+              <a:t>· 新增 80 条标注为口头确认（抽查表未勾选），标注一致性未计算</a:t>
             </a:r>
           </a:p>
         </p:txBody>
@@ -4775,7 +4775,7 @@
                   <a:srgbClr val="222222"/>
                 </a:solidFill>
               </a:rPr>
-              <a:t>P0　实现 B0 基线，回答「证据增强到底提升了多少」</a:t>
+              <a:t>P0　请不了解系统实现的人独立标注（或双人标注 + kappa）</a:t>
             </a:r>
           </a:p>
           <a:p>
@@ -5027,7 +5027,22 @@
                   <a:srgbClr val="5F6B7A"/>
                 </a:solidFill>
               </a:rPr>
-              <a:t>scripts/run_evaluation.py --baseline b1 --all（免费下界基线，20 条全量）</a:t>
+              <a:t>scripts/run_evaluation.py --baseline b0 --all（直接问模型基线）</a:t>
+            </a:r>
+          </a:p>
+          <a:p>
+            <a:pPr>
+              <a:spcAft>
+                <a:spcPts val="200"/>
+              </a:spcAft>
+            </a:pPr>
+            <a:r>
+              <a:rPr sz="1200" b="0">
+                <a:solidFill>
+                  <a:srgbClr val="5F6B7A"/>
+                </a:solidFill>
+              </a:rPr>
+              <a:t>scripts/run_evaluation.py --baseline b1 --all（免费下界基线，100 条全量）</a:t>
             </a:r>
           </a:p>
           <a:p>
@@ -5737,7 +5752,7 @@
                             <a:srgbClr val="222222"/>
                           </a:solidFill>
                         </a:rPr>
-                        <a:t>用例总数 / 覆盖类别 / 人工已确认 20 条 + 标注表（含真值来源）</a:t>
+                        <a:t>用例总数 100 / 覆盖类别 7 / 人工已确认 100 条 + 标注表（含真值来源）</a:t>
                       </a:r>
                     </a:p>
                   </a:txBody>
@@ -5790,7 +5805,7 @@
                             <a:srgbClr val="222222"/>
                           </a:solidFill>
                         </a:rPr>
-                        <a:t>指标卡片 + 混淆矩阵 + 失败案例 + 实验说明与局限</a:t>
+                        <a:t>三基线指标卡片 + 混淆矩阵 + 失败案例 + 实验说明与局限</a:t>
                       </a:r>
                     </a:p>
                   </a:txBody>
@@ -8016,7 +8031,7 @@
                   <a:srgbClr val="222222"/>
                 </a:solidFill>
               </a:rPr>
-              <a:t>绝不因为「查到了论文」就默认它支持原文的说法。实测误报率 10%（1/10），且该误报是「把正确事实说得过重」，不是凭空指控。</a:t>
+              <a:t>绝不因为「查到了论文」就默认它支持原文的说法。实测误报率 2.0%，而直接问模型的误报率高达 44.9%——后者会把近一半正确内容判成有问题。</a:t>
             </a:r>
           </a:p>
           <a:p>
@@ -8488,7 +8503,7 @@
                             <a:srgbClr val="222222"/>
                           </a:solidFill>
                         </a:rPr>
-                        <a:t>全量 20 条真实指标 + 3 条失败案例 + 自曝局限</a:t>
+                        <a:t>三基线对照（B0/B1/B2）+ 失败案例 + 自曝局限</a:t>
                       </a:r>
                     </a:p>
                   </a:txBody>
@@ -8643,7 +8658,7 @@
                   <a:srgbClr val="14314F"/>
                 </a:solidFill>
               </a:rPr>
-              <a:t>实测结果：全量 20 条，两个基线对比</a:t>
+              <a:t>实测结果：全量 100 条，三个基线对照</a:t>
             </a:r>
           </a:p>
         </p:txBody>
@@ -8681,7 +8696,7 @@
                   <a:srgbClr val="5F6B7A"/>
                 </a:solidFill>
               </a:rPr>
-              <a:t>主模型 deepseek-chat + 跨厂商独立复核 agnes-3.0-flash</a:t>
+              <a:t>同一批用例、同一个模型；B0 与 B2 的差异只来自方法</a:t>
             </a:r>
           </a:p>
         </p:txBody>
@@ -8696,7 +8711,7 @@
         </p:nvGraphicFramePr>
         <p:xfrm>
           <a:off x="502920" y="1508760"/>
-          <a:ext cx="11155679" cy="4023360"/>
+          <a:ext cx="11155680" cy="4023360"/>
         </p:xfrm>
         <a:graphic>
           <a:graphicData uri="http://schemas.openxmlformats.org/drawingml/2006/table">
@@ -8705,9 +8720,10 @@
                 <a:tableStyleId>{5C22544A-7EE6-4342-B048-85BDC9FD1C3A}</a:tableStyleId>
               </a:tblPr>
               <a:tblGrid>
-                <a:gridCol w="3291840"/>
-                <a:gridCol w="3749039"/>
-                <a:gridCol w="4114800"/>
+                <a:gridCol w="2743200"/>
+                <a:gridCol w="2468880"/>
+                <a:gridCol w="2468880"/>
+                <a:gridCol w="3474720"/>
               </a:tblGrid>
               <a:tr h="447040">
                 <a:tc>
@@ -8716,7 +8732,7 @@
                     <a:lstStyle/>
                     <a:p>
                       <a:r>
-                        <a:rPr sz="1100" b="1">
+                        <a:rPr sz="1000" b="1">
                           <a:solidFill>
                             <a:srgbClr val="FFFFFF"/>
                           </a:solidFill>
@@ -8737,12 +8753,12 @@
                     <a:lstStyle/>
                     <a:p>
                       <a:r>
-                        <a:rPr sz="1100" b="1">
+                        <a:rPr sz="1000" b="1">
                           <a:solidFill>
                             <a:srgbClr val="FFFFFF"/>
                           </a:solidFill>
                         </a:rPr>
-                        <a:t>B1 离线规则引擎（不检索）</a:t>
+                        <a:t>B0 直接问模型</a:t>
                       </a:r>
                     </a:p>
                   </a:txBody>
@@ -8758,12 +8774,12 @@
                     <a:lstStyle/>
                     <a:p>
                       <a:r>
-                        <a:rPr sz="1100" b="1">
+                        <a:rPr sz="1000" b="1">
                           <a:solidFill>
                             <a:srgbClr val="FFFFFF"/>
                           </a:solidFill>
                         </a:rPr>
-                        <a:t>B2 完整流程</a:t>
+                        <a:t>B1 离线规则引擎</a:t>
                       </a:r>
                     </a:p>
                   </a:txBody>
@@ -8773,6 +8789,27 @@
                     </a:solidFill>
                   </a:tcPr>
                 </a:tc>
+                <a:tc>
+                  <a:txBody>
+                    <a:bodyPr/>
+                    <a:lstStyle/>
+                    <a:p>
+                      <a:r>
+                        <a:rPr sz="1000" b="1">
+                          <a:solidFill>
+                            <a:srgbClr val="FFFFFF"/>
+                          </a:solidFill>
+                        </a:rPr>
+                        <a:t>B2 本项目</a:t>
+                      </a:r>
+                    </a:p>
+                  </a:txBody>
+                  <a:tcPr>
+                    <a:solidFill>
+                      <a:srgbClr val="1F4E79"/>
+                    </a:solidFill>
+                  </a:tcPr>
+                </a:tc>
               </a:tr>
               <a:tr h="447040">
                 <a:tc>
@@ -8781,7 +8818,7 @@
                     <a:lstStyle/>
                     <a:p>
                       <a:r>
-                        <a:rPr sz="1100">
+                        <a:rPr sz="1000">
                           <a:solidFill>
                             <a:srgbClr val="222222"/>
                           </a:solidFill>
@@ -8798,29 +8835,46 @@
                     <a:lstStyle/>
                     <a:p>
                       <a:r>
-                        <a:rPr sz="1100">
-                          <a:solidFill>
-                            <a:srgbClr val="222222"/>
-                          </a:solidFill>
-                        </a:rPr>
-                        <a:t>100% / 30.0% / 46.2%</a:t>
-                      </a:r>
-                    </a:p>
-                  </a:txBody>
-                  <a:tcPr/>
-                </a:tc>
-                <a:tc>
-                  <a:txBody>
-                    <a:bodyPr/>
-                    <a:lstStyle/>
-                    <a:p>
-                      <a:r>
-                        <a:rPr sz="1100">
-                          <a:solidFill>
-                            <a:srgbClr val="222222"/>
-                          </a:solidFill>
-                        </a:rPr>
-                        <a:t>90.9% / 100% / 95.2%</a:t>
+                        <a:rPr sz="1000">
+                          <a:solidFill>
+                            <a:srgbClr val="222222"/>
+                          </a:solidFill>
+                        </a:rPr>
+                        <a:t>61.4% / 68.6% / 64.8%</a:t>
+                      </a:r>
+                    </a:p>
+                  </a:txBody>
+                  <a:tcPr/>
+                </a:tc>
+                <a:tc>
+                  <a:txBody>
+                    <a:bodyPr/>
+                    <a:lstStyle/>
+                    <a:p>
+                      <a:r>
+                        <a:rPr sz="1000">
+                          <a:solidFill>
+                            <a:srgbClr val="222222"/>
+                          </a:solidFill>
+                        </a:rPr>
+                        <a:t>100.0% / 21.6% / 35.5%</a:t>
+                      </a:r>
+                    </a:p>
+                  </a:txBody>
+                  <a:tcPr/>
+                </a:tc>
+                <a:tc>
+                  <a:txBody>
+                    <a:bodyPr/>
+                    <a:lstStyle/>
+                    <a:p>
+                      <a:r>
+                        <a:rPr sz="1000">
+                          <a:solidFill>
+                            <a:srgbClr val="222222"/>
+                          </a:solidFill>
+                        </a:rPr>
+                        <a:t>97.6% / 78.4% / 87.0%</a:t>
                       </a:r>
                     </a:p>
                   </a:txBody>
@@ -8834,7 +8888,7 @@
                     <a:lstStyle/>
                     <a:p>
                       <a:r>
-                        <a:rPr sz="1100">
+                        <a:rPr sz="1000">
                           <a:solidFill>
                             <a:srgbClr val="222222"/>
                           </a:solidFill>
@@ -8851,29 +8905,46 @@
                     <a:lstStyle/>
                     <a:p>
                       <a:r>
-                        <a:rPr sz="1100">
-                          <a:solidFill>
-                            <a:srgbClr val="222222"/>
-                          </a:solidFill>
-                        </a:rPr>
-                        <a:t>0%</a:t>
-                      </a:r>
-                    </a:p>
-                  </a:txBody>
-                  <a:tcPr/>
-                </a:tc>
-                <a:tc>
-                  <a:txBody>
-                    <a:bodyPr/>
-                    <a:lstStyle/>
-                    <a:p>
-                      <a:r>
-                        <a:rPr sz="1100">
-                          <a:solidFill>
-                            <a:srgbClr val="222222"/>
-                          </a:solidFill>
-                        </a:rPr>
-                        <a:t>10.0%（1/10，G02）</a:t>
+                        <a:rPr sz="1000">
+                          <a:solidFill>
+                            <a:srgbClr val="222222"/>
+                          </a:solidFill>
+                        </a:rPr>
+                        <a:t>44.9%</a:t>
+                      </a:r>
+                    </a:p>
+                  </a:txBody>
+                  <a:tcPr/>
+                </a:tc>
+                <a:tc>
+                  <a:txBody>
+                    <a:bodyPr/>
+                    <a:lstStyle/>
+                    <a:p>
+                      <a:r>
+                        <a:rPr sz="1000">
+                          <a:solidFill>
+                            <a:srgbClr val="222222"/>
+                          </a:solidFill>
+                        </a:rPr>
+                        <a:t>0.0%</a:t>
+                      </a:r>
+                    </a:p>
+                  </a:txBody>
+                  <a:tcPr/>
+                </a:tc>
+                <a:tc>
+                  <a:txBody>
+                    <a:bodyPr/>
+                    <a:lstStyle/>
+                    <a:p>
+                      <a:r>
+                        <a:rPr sz="1000">
+                          <a:solidFill>
+                            <a:srgbClr val="222222"/>
+                          </a:solidFill>
+                        </a:rPr>
+                        <a:t>2.0%</a:t>
                       </a:r>
                     </a:p>
                   </a:txBody>
@@ -8887,7 +8958,7 @@
                     <a:lstStyle/>
                     <a:p>
                       <a:r>
-                        <a:rPr sz="1100">
+                        <a:rPr sz="1000">
                           <a:solidFill>
                             <a:srgbClr val="222222"/>
                           </a:solidFill>
@@ -8904,29 +8975,46 @@
                     <a:lstStyle/>
                     <a:p>
                       <a:r>
-                        <a:rPr sz="1100">
-                          <a:solidFill>
-                            <a:srgbClr val="222222"/>
-                          </a:solidFill>
-                        </a:rPr>
-                        <a:t>40.0%</a:t>
-                      </a:r>
-                    </a:p>
-                  </a:txBody>
-                  <a:tcPr/>
-                </a:tc>
-                <a:tc>
-                  <a:txBody>
-                    <a:bodyPr/>
-                    <a:lstStyle/>
-                    <a:p>
-                      <a:r>
-                        <a:rPr sz="1100">
-                          <a:solidFill>
-                            <a:srgbClr val="222222"/>
-                          </a:solidFill>
-                        </a:rPr>
-                        <a:t>85.0%</a:t>
+                        <a:rPr sz="1000">
+                          <a:solidFill>
+                            <a:srgbClr val="222222"/>
+                          </a:solidFill>
+                        </a:rPr>
+                        <a:t>52.0%</a:t>
+                      </a:r>
+                    </a:p>
+                  </a:txBody>
+                  <a:tcPr/>
+                </a:tc>
+                <a:tc>
+                  <a:txBody>
+                    <a:bodyPr/>
+                    <a:lstStyle/>
+                    <a:p>
+                      <a:r>
+                        <a:rPr sz="1000">
+                          <a:solidFill>
+                            <a:srgbClr val="222222"/>
+                          </a:solidFill>
+                        </a:rPr>
+                        <a:t>41.4%</a:t>
+                      </a:r>
+                    </a:p>
+                  </a:txBody>
+                  <a:tcPr/>
+                </a:tc>
+                <a:tc>
+                  <a:txBody>
+                    <a:bodyPr/>
+                    <a:lstStyle/>
+                    <a:p>
+                      <a:r>
+                        <a:rPr sz="1000">
+                          <a:solidFill>
+                            <a:srgbClr val="222222"/>
+                          </a:solidFill>
+                        </a:rPr>
+                        <a:t>79.0%</a:t>
                       </a:r>
                     </a:p>
                   </a:txBody>
@@ -8940,7 +9028,7 @@
                     <a:lstStyle/>
                     <a:p>
                       <a:r>
-                        <a:rPr sz="1100">
+                        <a:rPr sz="1000">
                           <a:solidFill>
                             <a:srgbClr val="222222"/>
                           </a:solidFill>
@@ -8957,29 +9045,46 @@
                     <a:lstStyle/>
                     <a:p>
                       <a:r>
-                        <a:rPr sz="1100">
-                          <a:solidFill>
-                            <a:srgbClr val="222222"/>
-                          </a:solidFill>
-                        </a:rPr>
-                        <a:t>15.0%</a:t>
-                      </a:r>
-                    </a:p>
-                  </a:txBody>
-                  <a:tcPr/>
-                </a:tc>
-                <a:tc>
-                  <a:txBody>
-                    <a:bodyPr/>
-                    <a:lstStyle/>
-                    <a:p>
-                      <a:r>
-                        <a:rPr sz="1100">
-                          <a:solidFill>
-                            <a:srgbClr val="222222"/>
-                          </a:solidFill>
-                        </a:rPr>
-                        <a:t>75.0%</a:t>
+                        <a:rPr sz="1000">
+                          <a:solidFill>
+                            <a:srgbClr val="222222"/>
+                          </a:solidFill>
+                        </a:rPr>
+                        <a:t>0.0%（定义如此）</a:t>
+                      </a:r>
+                    </a:p>
+                  </a:txBody>
+                  <a:tcPr/>
+                </a:tc>
+                <a:tc>
+                  <a:txBody>
+                    <a:bodyPr/>
+                    <a:lstStyle/>
+                    <a:p>
+                      <a:r>
+                        <a:rPr sz="1000">
+                          <a:solidFill>
+                            <a:srgbClr val="222222"/>
+                          </a:solidFill>
+                        </a:rPr>
+                        <a:t>11.1%</a:t>
+                      </a:r>
+                    </a:p>
+                  </a:txBody>
+                  <a:tcPr/>
+                </a:tc>
+                <a:tc>
+                  <a:txBody>
+                    <a:bodyPr/>
+                    <a:lstStyle/>
+                    <a:p>
+                      <a:r>
+                        <a:rPr sz="1000">
+                          <a:solidFill>
+                            <a:srgbClr val="222222"/>
+                          </a:solidFill>
+                        </a:rPr>
+                        <a:t>69.0%</a:t>
                       </a:r>
                     </a:p>
                   </a:txBody>
@@ -8993,7 +9098,7 @@
                     <a:lstStyle/>
                     <a:p>
                       <a:r>
-                        <a:rPr sz="1100">
+                        <a:rPr sz="1000">
                           <a:solidFill>
                             <a:srgbClr val="222222"/>
                           </a:solidFill>
@@ -9010,29 +9115,46 @@
                     <a:lstStyle/>
                     <a:p>
                       <a:r>
-                        <a:rPr sz="1100">
-                          <a:solidFill>
-                            <a:srgbClr val="222222"/>
-                          </a:solidFill>
-                        </a:rPr>
-                        <a:t>0% / 100%</a:t>
-                      </a:r>
-                    </a:p>
-                  </a:txBody>
-                  <a:tcPr/>
-                </a:tc>
-                <a:tc>
-                  <a:txBody>
-                    <a:bodyPr/>
-                    <a:lstStyle/>
-                    <a:p>
-                      <a:r>
-                        <a:rPr sz="1100">
-                          <a:solidFill>
-                            <a:srgbClr val="222222"/>
-                          </a:solidFill>
-                        </a:rPr>
-                        <a:t>80% / 20%</a:t>
+                        <a:rPr sz="1000">
+                          <a:solidFill>
+                            <a:srgbClr val="222222"/>
+                          </a:solidFill>
+                        </a:rPr>
+                        <a:t>0.0% / 100.0%</a:t>
+                      </a:r>
+                    </a:p>
+                  </a:txBody>
+                  <a:tcPr/>
+                </a:tc>
+                <a:tc>
+                  <a:txBody>
+                    <a:bodyPr/>
+                    <a:lstStyle/>
+                    <a:p>
+                      <a:r>
+                        <a:rPr sz="1000">
+                          <a:solidFill>
+                            <a:srgbClr val="222222"/>
+                          </a:solidFill>
+                        </a:rPr>
+                        <a:t>0.0% / 100.0%</a:t>
+                      </a:r>
+                    </a:p>
+                  </a:txBody>
+                  <a:tcPr/>
+                </a:tc>
+                <a:tc>
+                  <a:txBody>
+                    <a:bodyPr/>
+                    <a:lstStyle/>
+                    <a:p>
+                      <a:r>
+                        <a:rPr sz="1000">
+                          <a:solidFill>
+                            <a:srgbClr val="222222"/>
+                          </a:solidFill>
+                        </a:rPr>
+                        <a:t>79.3% / 20.7%</a:t>
                       </a:r>
                     </a:p>
                   </a:txBody>
@@ -9046,7 +9168,7 @@
                     <a:lstStyle/>
                     <a:p>
                       <a:r>
-                        <a:rPr sz="1100">
+                        <a:rPr sz="1000">
                           <a:solidFill>
                             <a:srgbClr val="222222"/>
                           </a:solidFill>
@@ -9063,29 +9185,46 @@
                     <a:lstStyle/>
                     <a:p>
                       <a:r>
-                        <a:rPr sz="1100">
-                          <a:solidFill>
-                            <a:srgbClr val="222222"/>
-                          </a:solidFill>
-                        </a:rPr>
-                        <a:t>0%</a:t>
-                      </a:r>
-                    </a:p>
-                  </a:txBody>
-                  <a:tcPr/>
-                </a:tc>
-                <a:tc>
-                  <a:txBody>
-                    <a:bodyPr/>
-                    <a:lstStyle/>
-                    <a:p>
-                      <a:r>
-                        <a:rPr sz="1100">
-                          <a:solidFill>
-                            <a:srgbClr val="222222"/>
-                          </a:solidFill>
-                        </a:rPr>
-                        <a:t>0%</a:t>
+                        <a:rPr sz="1000">
+                          <a:solidFill>
+                            <a:srgbClr val="222222"/>
+                          </a:solidFill>
+                        </a:rPr>
+                        <a:t>0.0%</a:t>
+                      </a:r>
+                    </a:p>
+                  </a:txBody>
+                  <a:tcPr/>
+                </a:tc>
+                <a:tc>
+                  <a:txBody>
+                    <a:bodyPr/>
+                    <a:lstStyle/>
+                    <a:p>
+                      <a:r>
+                        <a:rPr sz="1000">
+                          <a:solidFill>
+                            <a:srgbClr val="222222"/>
+                          </a:solidFill>
+                        </a:rPr>
+                        <a:t>0.0%</a:t>
+                      </a:r>
+                    </a:p>
+                  </a:txBody>
+                  <a:tcPr/>
+                </a:tc>
+                <a:tc>
+                  <a:txBody>
+                    <a:bodyPr/>
+                    <a:lstStyle/>
+                    <a:p>
+                      <a:r>
+                        <a:rPr sz="1000">
+                          <a:solidFill>
+                            <a:srgbClr val="222222"/>
+                          </a:solidFill>
+                        </a:rPr>
+                        <a:t>0.0%</a:t>
                       </a:r>
                     </a:p>
                   </a:txBody>
@@ -9099,46 +9238,63 @@
                     <a:lstStyle/>
                     <a:p>
                       <a:r>
-                        <a:rPr sz="1100">
-                          <a:solidFill>
-                            <a:srgbClr val="222222"/>
-                          </a:solidFill>
-                        </a:rPr>
-                        <a:t>冷启动耗时 / 模型调用</a:t>
-                      </a:r>
-                    </a:p>
-                  </a:txBody>
-                  <a:tcPr/>
-                </a:tc>
-                <a:tc>
-                  <a:txBody>
-                    <a:bodyPr/>
-                    <a:lstStyle/>
-                    <a:p>
-                      <a:r>
-                        <a:rPr sz="1100">
-                          <a:solidFill>
-                            <a:srgbClr val="222222"/>
-                          </a:solidFill>
-                        </a:rPr>
-                        <a:t>1 ms / 0 次</a:t>
-                      </a:r>
-                    </a:p>
-                  </a:txBody>
-                  <a:tcPr/>
-                </a:tc>
-                <a:tc>
-                  <a:txBody>
-                    <a:bodyPr/>
-                    <a:lstStyle/>
-                    <a:p>
-                      <a:r>
-                        <a:rPr sz="1100">
-                          <a:solidFill>
-                            <a:srgbClr val="222222"/>
-                          </a:solidFill>
-                        </a:rPr>
-                        <a:t>10.4 秒每用例 / 2.1 次每用例</a:t>
+                        <a:rPr sz="1000">
+                          <a:solidFill>
+                            <a:srgbClr val="222222"/>
+                          </a:solidFill>
+                        </a:rPr>
+                        <a:t>外部检索查询（100 条合计）</a:t>
+                      </a:r>
+                    </a:p>
+                  </a:txBody>
+                  <a:tcPr/>
+                </a:tc>
+                <a:tc>
+                  <a:txBody>
+                    <a:bodyPr/>
+                    <a:lstStyle/>
+                    <a:p>
+                      <a:r>
+                        <a:rPr sz="1000">
+                          <a:solidFill>
+                            <a:srgbClr val="222222"/>
+                          </a:solidFill>
+                        </a:rPr>
+                        <a:t>0（不检索）</a:t>
+                      </a:r>
+                    </a:p>
+                  </a:txBody>
+                  <a:tcPr/>
+                </a:tc>
+                <a:tc>
+                  <a:txBody>
+                    <a:bodyPr/>
+                    <a:lstStyle/>
+                    <a:p>
+                      <a:r>
+                        <a:rPr sz="1000">
+                          <a:solidFill>
+                            <a:srgbClr val="222222"/>
+                          </a:solidFill>
+                        </a:rPr>
+                        <a:t>0（不检索）</a:t>
+                      </a:r>
+                    </a:p>
+                  </a:txBody>
+                  <a:tcPr/>
+                </a:tc>
+                <a:tc>
+                  <a:txBody>
+                    <a:bodyPr/>
+                    <a:lstStyle/>
+                    <a:p>
+                      <a:r>
+                        <a:rPr sz="1000">
+                          <a:solidFill>
+                            <a:srgbClr val="222222"/>
+                          </a:solidFill>
+                        </a:rPr>
+                        <a:t>76 次</a:t>
                       </a:r>
                     </a:p>
                   </a:txBody>
@@ -9152,24 +9308,41 @@
                     <a:lstStyle/>
                     <a:p>
                       <a:r>
-                        <a:rPr sz="1100">
-                          <a:solidFill>
-                            <a:srgbClr val="222222"/>
-                          </a:solidFill>
-                        </a:rPr>
-                        <a:t>冷启动 token（20 条合计）</a:t>
-                      </a:r>
-                    </a:p>
-                  </a:txBody>
-                  <a:tcPr/>
-                </a:tc>
-                <a:tc>
-                  <a:txBody>
-                    <a:bodyPr/>
-                    <a:lstStyle/>
-                    <a:p>
-                      <a:r>
-                        <a:rPr sz="1100">
+                        <a:rPr sz="1000">
+                          <a:solidFill>
+                            <a:srgbClr val="222222"/>
+                          </a:solidFill>
+                        </a:rPr>
+                        <a:t>冷启动成本（首次全量实测）</a:t>
+                      </a:r>
+                    </a:p>
+                  </a:txBody>
+                  <a:tcPr/>
+                </a:tc>
+                <a:tc>
+                  <a:txBody>
+                    <a:bodyPr/>
+                    <a:lstStyle/>
+                    <a:p>
+                      <a:r>
+                        <a:rPr sz="1000">
+                          <a:solidFill>
+                            <a:srgbClr val="222222"/>
+                          </a:solidFill>
+                        </a:rPr>
+                        <a:t>—</a:t>
+                      </a:r>
+                    </a:p>
+                  </a:txBody>
+                  <a:tcPr/>
+                </a:tc>
+                <a:tc>
+                  <a:txBody>
+                    <a:bodyPr/>
+                    <a:lstStyle/>
+                    <a:p>
+                      <a:r>
+                        <a:rPr sz="1000">
                           <a:solidFill>
                             <a:srgbClr val="222222"/>
                           </a:solidFill>
@@ -9186,12 +9359,12 @@
                     <a:lstStyle/>
                     <a:p>
                       <a:r>
-                        <a:rPr sz="1100">
-                          <a:solidFill>
-                            <a:srgbClr val="222222"/>
-                          </a:solidFill>
-                        </a:rPr>
-                        <a:t>93,846</a:t>
+                        <a:rPr sz="1000">
+                          <a:solidFill>
+                            <a:srgbClr val="222222"/>
+                          </a:solidFill>
+                        </a:rPr>
+                        <a:t>11.4 秒每用例 / 2.4 次调用 / 477,841 token</a:t>
                       </a:r>
                     </a:p>
                   </a:txBody>
@@ -9235,7 +9408,7 @@
                   <a:srgbClr val="5F6B7A"/>
                 </a:solidFill>
               </a:rPr>
-              <a:t>复跑同一批用例命中缓存：0 次计费调用、平均 26 毫秒/用例，结果与首次一致。</a:t>
+              <a:t>B0 与 B2 使用同一个模型，差异只来自方法：B0 无外部证据、B2 有检索与规则裁决。复跑命中缓存为 0 次计费调用。</a:t>
             </a:r>
           </a:p>
         </p:txBody>

--- a/docs/智鉴AI-演示PPT.pptx
+++ b/docs/智鉴AI-演示PPT.pptx
@@ -3173,7 +3173,7 @@
                   <a:srgbClr val="1F4E79"/>
                 </a:solidFill>
               </a:rPr>
-              <a:t>多模型协同的 AI 幻觉检测、证据溯源、错误归因与自动修正系统</a:t>
+              <a:t>面向科研文本的事实核验 Agent</a:t>
             </a:r>
           </a:p>
           <a:p>
@@ -3188,7 +3188,7 @@
                   <a:srgbClr val="5F6B7A"/>
                 </a:solidFill>
               </a:rPr>
-              <a:t>把「相信一个模型」换成「一条可审计的校验流水线」</a:t>
+              <a:t>任务规划 · 工具调用 · 执行反馈 · 结果验证 · 异常处理</a:t>
             </a:r>
           </a:p>
         </p:txBody>

--- a/docs/智鉴AI-演示PPT.pptx
+++ b/docs/智鉴AI-演示PPT.pptx
@@ -4218,7 +4218,7 @@
                             <a:srgbClr val="222222"/>
                           </a:solidFill>
                         </a:rPr>
-                        <a:t>修正成功率虚高：未采用任何修正时按空文本判定，导致指标虚高（B1 20%、B2 100%）</a:t>
+                        <a:t>修正成功率虚高：未采用任何修正时按空文本判定，导致指标虚高（离线基线 20%、完整流程 100%）</a:t>
                       </a:r>
                     </a:p>
                   </a:txBody>
@@ -4271,7 +4271,7 @@
                             <a:srgbClr val="222222"/>
                           </a:solidFill>
                         </a:rPr>
-                        <a:t>237 个测试全绿却没抓到（只测了空状态）→ 补上「喂真实数据」的回归测试</a:t>
+                        <a:t>当时 239 个测试全绿却没抓到（只测了空状态）→ 补上「喂真实数据」的回归测试</a:t>
                       </a:r>
                     </a:p>
                   </a:txBody>
@@ -4402,7 +4402,7 @@
                   <a:srgbClr val="222222"/>
                 </a:solidFill>
               </a:rPr>
-              <a:t>237 项自动化测试（全部离线可跑、零成本）　|　pyflakes 静态检查 0 告警　|　85 个受版本控制的文件　|　10+ 次阶段化提交</a:t>
+              <a:t>245 项自动化测试（全部离线可跑、零成本）　|　pyflakes 静态检查 0 告警　|　85 个受版本控制的文件　|　10+ 次阶段化提交</a:t>
             </a:r>
           </a:p>
           <a:p>
@@ -5328,7 +5328,7 @@
                             <a:srgbClr val="222222"/>
                           </a:solidFill>
                         </a:rPr>
-                        <a:t>项目定位 + 运行模式徽标 + 七个能力徽标 + 快速体验（内置样例）按钮</a:t>
+                        <a:t>项目定位 + 运行模式 + 赛题五环节关键词 + 任务闭环对照表 + 样例核验按钮</a:t>
                       </a:r>
                     </a:p>
                   </a:txBody>
@@ -8445,7 +8445,7 @@
                             <a:srgbClr val="222222"/>
                           </a:solidFill>
                         </a:rPr>
-                        <a:t>修正员提出 2008→2013，独立复核员**否决**了它，理由写得很具体</a:t>
+                        <a:t>修正员提出 2008→2013；独立复核员逐项检查后**指出它无法解决的风险**（该 DOI 的真实标题与原文主题不符），风险被写进报告</a:t>
                       </a:r>
                     </a:p>
                   </a:txBody>
@@ -8658,7 +8658,7 @@
                   <a:srgbClr val="14314F"/>
                 </a:solidFill>
               </a:rPr>
-              <a:t>实测结果：全量 100 条，三个基线对照</a:t>
+              <a:t>实测结果：全量 100 条，直接问模型 vs 本项目</a:t>
             </a:r>
           </a:p>
         </p:txBody>
@@ -8696,7 +8696,7 @@
                   <a:srgbClr val="5F6B7A"/>
                 </a:solidFill>
               </a:rPr>
-              <a:t>同一批用例、同一个模型；B0 与 B2 的差异只来自方法</a:t>
+              <a:t>同一批用例、同一个模型；两者差异只来自方法</a:t>
             </a:r>
           </a:p>
         </p:txBody>
@@ -8711,7 +8711,7 @@
         </p:nvGraphicFramePr>
         <p:xfrm>
           <a:off x="502920" y="1508760"/>
-          <a:ext cx="11155680" cy="4023360"/>
+          <a:ext cx="10607040" cy="4023360"/>
         </p:xfrm>
         <a:graphic>
           <a:graphicData uri="http://schemas.openxmlformats.org/drawingml/2006/table">
@@ -8720,19 +8720,18 @@
                 <a:tableStyleId>{5C22544A-7EE6-4342-B048-85BDC9FD1C3A}</a:tableStyleId>
               </a:tblPr>
               <a:tblGrid>
-                <a:gridCol w="2743200"/>
-                <a:gridCol w="2468880"/>
-                <a:gridCol w="2468880"/>
-                <a:gridCol w="3474720"/>
+                <a:gridCol w="3291840"/>
+                <a:gridCol w="3291840"/>
+                <a:gridCol w="4023360"/>
               </a:tblGrid>
-              <a:tr h="447040">
-                <a:tc>
-                  <a:txBody>
-                    <a:bodyPr/>
-                    <a:lstStyle/>
-                    <a:p>
-                      <a:r>
-                        <a:rPr sz="1000" b="1">
+              <a:tr h="268224">
+                <a:tc>
+                  <a:txBody>
+                    <a:bodyPr/>
+                    <a:lstStyle/>
+                    <a:p>
+                      <a:r>
+                        <a:rPr sz="1100" b="1">
                           <a:solidFill>
                             <a:srgbClr val="FFFFFF"/>
                           </a:solidFill>
@@ -8753,7 +8752,7 @@
                     <a:lstStyle/>
                     <a:p>
                       <a:r>
-                        <a:rPr sz="1000" b="1">
+                        <a:rPr sz="1100" b="1">
                           <a:solidFill>
                             <a:srgbClr val="FFFFFF"/>
                           </a:solidFill>
@@ -8774,12 +8773,12 @@
                     <a:lstStyle/>
                     <a:p>
                       <a:r>
-                        <a:rPr sz="1000" b="1">
+                        <a:rPr sz="1100" b="1">
                           <a:solidFill>
                             <a:srgbClr val="FFFFFF"/>
                           </a:solidFill>
                         </a:rPr>
-                        <a:t>B1 离线规则引擎</a:t>
+                        <a:t>B1 本项目方法</a:t>
                       </a:r>
                     </a:p>
                   </a:txBody>
@@ -8789,36 +8788,15 @@
                     </a:solidFill>
                   </a:tcPr>
                 </a:tc>
-                <a:tc>
-                  <a:txBody>
-                    <a:bodyPr/>
-                    <a:lstStyle/>
-                    <a:p>
-                      <a:r>
-                        <a:rPr sz="1000" b="1">
-                          <a:solidFill>
-                            <a:srgbClr val="FFFFFF"/>
-                          </a:solidFill>
-                        </a:rPr>
-                        <a:t>B2 本项目</a:t>
-                      </a:r>
-                    </a:p>
-                  </a:txBody>
-                  <a:tcPr>
-                    <a:solidFill>
-                      <a:srgbClr val="1F4E79"/>
-                    </a:solidFill>
-                  </a:tcPr>
-                </a:tc>
               </a:tr>
-              <a:tr h="447040">
-                <a:tc>
-                  <a:txBody>
-                    <a:bodyPr/>
-                    <a:lstStyle/>
-                    <a:p>
-                      <a:r>
-                        <a:rPr sz="1000">
+              <a:tr h="268224">
+                <a:tc>
+                  <a:txBody>
+                    <a:bodyPr/>
+                    <a:lstStyle/>
+                    <a:p>
+                      <a:r>
+                        <a:rPr sz="1100">
                           <a:solidFill>
                             <a:srgbClr val="222222"/>
                           </a:solidFill>
@@ -8835,7 +8813,7 @@
                     <a:lstStyle/>
                     <a:p>
                       <a:r>
-                        <a:rPr sz="1000">
+                        <a:rPr sz="1100">
                           <a:solidFill>
                             <a:srgbClr val="222222"/>
                           </a:solidFill>
@@ -8852,24 +8830,7 @@
                     <a:lstStyle/>
                     <a:p>
                       <a:r>
-                        <a:rPr sz="1000">
-                          <a:solidFill>
-                            <a:srgbClr val="222222"/>
-                          </a:solidFill>
-                        </a:rPr>
-                        <a:t>100.0% / 21.6% / 35.5%</a:t>
-                      </a:r>
-                    </a:p>
-                  </a:txBody>
-                  <a:tcPr/>
-                </a:tc>
-                <a:tc>
-                  <a:txBody>
-                    <a:bodyPr/>
-                    <a:lstStyle/>
-                    <a:p>
-                      <a:r>
-                        <a:rPr sz="1000">
+                        <a:rPr sz="1100">
                           <a:solidFill>
                             <a:srgbClr val="222222"/>
                           </a:solidFill>
@@ -8881,31 +8842,31 @@
                   <a:tcPr/>
                 </a:tc>
               </a:tr>
-              <a:tr h="447040">
-                <a:tc>
-                  <a:txBody>
-                    <a:bodyPr/>
-                    <a:lstStyle/>
-                    <a:p>
-                      <a:r>
-                        <a:rPr sz="1000">
-                          <a:solidFill>
-                            <a:srgbClr val="222222"/>
-                          </a:solidFill>
-                        </a:rPr>
-                        <a:t>误报率 FPR</a:t>
-                      </a:r>
-                    </a:p>
-                  </a:txBody>
-                  <a:tcPr/>
-                </a:tc>
-                <a:tc>
-                  <a:txBody>
-                    <a:bodyPr/>
-                    <a:lstStyle/>
-                    <a:p>
-                      <a:r>
-                        <a:rPr sz="1000">
+              <a:tr h="268224">
+                <a:tc>
+                  <a:txBody>
+                    <a:bodyPr/>
+                    <a:lstStyle/>
+                    <a:p>
+                      <a:r>
+                        <a:rPr sz="1100">
+                          <a:solidFill>
+                            <a:srgbClr val="222222"/>
+                          </a:solidFill>
+                        </a:rPr>
+                        <a:t>误报率 FPR（越低保越好）</a:t>
+                      </a:r>
+                    </a:p>
+                  </a:txBody>
+                  <a:tcPr/>
+                </a:tc>
+                <a:tc>
+                  <a:txBody>
+                    <a:bodyPr/>
+                    <a:lstStyle/>
+                    <a:p>
+                      <a:r>
+                        <a:rPr sz="1100">
                           <a:solidFill>
                             <a:srgbClr val="222222"/>
                           </a:solidFill>
@@ -8922,7 +8883,202 @@
                     <a:lstStyle/>
                     <a:p>
                       <a:r>
-                        <a:rPr sz="1000">
+                        <a:rPr sz="1100">
+                          <a:solidFill>
+                            <a:srgbClr val="222222"/>
+                          </a:solidFill>
+                        </a:rPr>
+                        <a:t>2.0%</a:t>
+                      </a:r>
+                    </a:p>
+                  </a:txBody>
+                  <a:tcPr/>
+                </a:tc>
+              </a:tr>
+              <a:tr h="268224">
+                <a:tc>
+                  <a:txBody>
+                    <a:bodyPr/>
+                    <a:lstStyle/>
+                    <a:p>
+                      <a:r>
+                        <a:rPr sz="1100">
+                          <a:solidFill>
+                            <a:srgbClr val="222222"/>
+                          </a:solidFill>
+                        </a:rPr>
+                        <a:t>六状态完全一致率</a:t>
+                      </a:r>
+                    </a:p>
+                  </a:txBody>
+                  <a:tcPr/>
+                </a:tc>
+                <a:tc>
+                  <a:txBody>
+                    <a:bodyPr/>
+                    <a:lstStyle/>
+                    <a:p>
+                      <a:r>
+                        <a:rPr sz="1100">
+                          <a:solidFill>
+                            <a:srgbClr val="222222"/>
+                          </a:solidFill>
+                        </a:rPr>
+                        <a:t>51.0%</a:t>
+                      </a:r>
+                    </a:p>
+                  </a:txBody>
+                  <a:tcPr/>
+                </a:tc>
+                <a:tc>
+                  <a:txBody>
+                    <a:bodyPr/>
+                    <a:lstStyle/>
+                    <a:p>
+                      <a:r>
+                        <a:rPr sz="1100">
+                          <a:solidFill>
+                            <a:srgbClr val="222222"/>
+                          </a:solidFill>
+                        </a:rPr>
+                        <a:t>79.0%</a:t>
+                      </a:r>
+                    </a:p>
+                  </a:txBody>
+                  <a:tcPr/>
+                </a:tc>
+              </a:tr>
+              <a:tr h="268224">
+                <a:tc>
+                  <a:txBody>
+                    <a:bodyPr/>
+                    <a:lstStyle/>
+                    <a:p>
+                      <a:r>
+                        <a:rPr sz="1100">
+                          <a:solidFill>
+                            <a:srgbClr val="222222"/>
+                          </a:solidFill>
+                        </a:rPr>
+                        <a:t>证据可追溯率</a:t>
+                      </a:r>
+                    </a:p>
+                  </a:txBody>
+                  <a:tcPr/>
+                </a:tc>
+                <a:tc>
+                  <a:txBody>
+                    <a:bodyPr/>
+                    <a:lstStyle/>
+                    <a:p>
+                      <a:r>
+                        <a:rPr sz="1100">
+                          <a:solidFill>
+                            <a:srgbClr val="222222"/>
+                          </a:solidFill>
+                        </a:rPr>
+                        <a:t>0.0%（定义如此）</a:t>
+                      </a:r>
+                    </a:p>
+                  </a:txBody>
+                  <a:tcPr/>
+                </a:tc>
+                <a:tc>
+                  <a:txBody>
+                    <a:bodyPr/>
+                    <a:lstStyle/>
+                    <a:p>
+                      <a:r>
+                        <a:rPr sz="1100">
+                          <a:solidFill>
+                            <a:srgbClr val="222222"/>
+                          </a:solidFill>
+                        </a:rPr>
+                        <a:t>69.0%</a:t>
+                      </a:r>
+                    </a:p>
+                  </a:txBody>
+                  <a:tcPr/>
+                </a:tc>
+              </a:tr>
+              <a:tr h="268224">
+                <a:tc>
+                  <a:txBody>
+                    <a:bodyPr/>
+                    <a:lstStyle/>
+                    <a:p>
+                      <a:r>
+                        <a:rPr sz="1100">
+                          <a:solidFill>
+                            <a:srgbClr val="222222"/>
+                          </a:solidFill>
+                        </a:rPr>
+                        <a:t>修正成功率 / 剩余错误率</a:t>
+                      </a:r>
+                    </a:p>
+                  </a:txBody>
+                  <a:tcPr/>
+                </a:tc>
+                <a:tc>
+                  <a:txBody>
+                    <a:bodyPr/>
+                    <a:lstStyle/>
+                    <a:p>
+                      <a:r>
+                        <a:rPr sz="1100">
+                          <a:solidFill>
+                            <a:srgbClr val="222222"/>
+                          </a:solidFill>
+                        </a:rPr>
+                        <a:t>0.0% / 100.0%</a:t>
+                      </a:r>
+                    </a:p>
+                  </a:txBody>
+                  <a:tcPr/>
+                </a:tc>
+                <a:tc>
+                  <a:txBody>
+                    <a:bodyPr/>
+                    <a:lstStyle/>
+                    <a:p>
+                      <a:r>
+                        <a:rPr sz="1100">
+                          <a:solidFill>
+                            <a:srgbClr val="222222"/>
+                          </a:solidFill>
+                        </a:rPr>
+                        <a:t>79.3% / 20.7%</a:t>
+                      </a:r>
+                    </a:p>
+                  </a:txBody>
+                  <a:tcPr/>
+                </a:tc>
+              </a:tr>
+              <a:tr h="268224">
+                <a:tc>
+                  <a:txBody>
+                    <a:bodyPr/>
+                    <a:lstStyle/>
+                    <a:p>
+                      <a:r>
+                        <a:rPr sz="1100">
+                          <a:solidFill>
+                            <a:srgbClr val="222222"/>
+                          </a:solidFill>
+                        </a:rPr>
+                        <a:t>新增错误率</a:t>
+                      </a:r>
+                    </a:p>
+                  </a:txBody>
+                  <a:tcPr/>
+                </a:tc>
+                <a:tc>
+                  <a:txBody>
+                    <a:bodyPr/>
+                    <a:lstStyle/>
+                    <a:p>
+                      <a:r>
+                        <a:rPr sz="1100">
                           <a:solidFill>
                             <a:srgbClr val="222222"/>
                           </a:solidFill>
@@ -8939,7 +9095,113 @@
                     <a:lstStyle/>
                     <a:p>
                       <a:r>
-                        <a:rPr sz="1000">
+                        <a:rPr sz="1100">
+                          <a:solidFill>
+                            <a:srgbClr val="222222"/>
+                          </a:solidFill>
+                        </a:rPr>
+                        <a:t>0.0%</a:t>
+                      </a:r>
+                    </a:p>
+                  </a:txBody>
+                  <a:tcPr/>
+                </a:tc>
+              </a:tr>
+              <a:tr h="268224">
+                <a:tc>
+                  <a:txBody>
+                    <a:bodyPr/>
+                    <a:lstStyle/>
+                    <a:p>
+                      <a:r>
+                        <a:rPr sz="1100">
+                          <a:solidFill>
+                            <a:srgbClr val="222222"/>
+                          </a:solidFill>
+                        </a:rPr>
+                        <a:t>外部检索查询（100 条合计）</a:t>
+                      </a:r>
+                    </a:p>
+                  </a:txBody>
+                  <a:tcPr/>
+                </a:tc>
+                <a:tc>
+                  <a:txBody>
+                    <a:bodyPr/>
+                    <a:lstStyle/>
+                    <a:p>
+                      <a:r>
+                        <a:rPr sz="1100">
+                          <a:solidFill>
+                            <a:srgbClr val="222222"/>
+                          </a:solidFill>
+                        </a:rPr>
+                        <a:t>0（不检索）</a:t>
+                      </a:r>
+                    </a:p>
+                  </a:txBody>
+                  <a:tcPr/>
+                </a:tc>
+                <a:tc>
+                  <a:txBody>
+                    <a:bodyPr/>
+                    <a:lstStyle/>
+                    <a:p>
+                      <a:r>
+                        <a:rPr sz="1100">
+                          <a:solidFill>
+                            <a:srgbClr val="222222"/>
+                          </a:solidFill>
+                        </a:rPr>
+                        <a:t>76 次</a:t>
+                      </a:r>
+                    </a:p>
+                  </a:txBody>
+                  <a:tcPr/>
+                </a:tc>
+              </a:tr>
+              <a:tr h="268224">
+                <a:tc>
+                  <a:txBody>
+                    <a:bodyPr/>
+                    <a:lstStyle/>
+                    <a:p>
+                      <a:r>
+                        <a:rPr sz="1100">
+                          <a:solidFill>
+                            <a:srgbClr val="222222"/>
+                          </a:solidFill>
+                        </a:rPr>
+                        <a:t>误报率 FPR（越低保越好）</a:t>
+                      </a:r>
+                    </a:p>
+                  </a:txBody>
+                  <a:tcPr/>
+                </a:tc>
+                <a:tc>
+                  <a:txBody>
+                    <a:bodyPr/>
+                    <a:lstStyle/>
+                    <a:p>
+                      <a:r>
+                        <a:rPr sz="1100">
+                          <a:solidFill>
+                            <a:srgbClr val="222222"/>
+                          </a:solidFill>
+                        </a:rPr>
+                        <a:t>44.9%</a:t>
+                      </a:r>
+                    </a:p>
+                  </a:txBody>
+                  <a:tcPr/>
+                </a:tc>
+                <a:tc>
+                  <a:txBody>
+                    <a:bodyPr/>
+                    <a:lstStyle/>
+                    <a:p>
+                      <a:r>
+                        <a:rPr sz="1100">
                           <a:solidFill>
                             <a:srgbClr val="222222"/>
                           </a:solidFill>
@@ -8951,14 +9213,14 @@
                   <a:tcPr/>
                 </a:tc>
               </a:tr>
-              <a:tr h="447040">
-                <a:tc>
-                  <a:txBody>
-                    <a:bodyPr/>
-                    <a:lstStyle/>
-                    <a:p>
-                      <a:r>
-                        <a:rPr sz="1000">
+              <a:tr h="268224">
+                <a:tc>
+                  <a:txBody>
+                    <a:bodyPr/>
+                    <a:lstStyle/>
+                    <a:p>
+                      <a:r>
+                        <a:rPr sz="1100">
                           <a:solidFill>
                             <a:srgbClr val="222222"/>
                           </a:solidFill>
@@ -8975,7 +9237,7 @@
                     <a:lstStyle/>
                     <a:p>
                       <a:r>
-                        <a:rPr sz="1000">
+                        <a:rPr sz="1100">
                           <a:solidFill>
                             <a:srgbClr val="222222"/>
                           </a:solidFill>
@@ -8992,24 +9254,7 @@
                     <a:lstStyle/>
                     <a:p>
                       <a:r>
-                        <a:rPr sz="1000">
-                          <a:solidFill>
-                            <a:srgbClr val="222222"/>
-                          </a:solidFill>
-                        </a:rPr>
-                        <a:t>41.4%</a:t>
-                      </a:r>
-                    </a:p>
-                  </a:txBody>
-                  <a:tcPr/>
-                </a:tc>
-                <a:tc>
-                  <a:txBody>
-                    <a:bodyPr/>
-                    <a:lstStyle/>
-                    <a:p>
-                      <a:r>
-                        <a:rPr sz="1000">
+                        <a:rPr sz="1100">
                           <a:solidFill>
                             <a:srgbClr val="222222"/>
                           </a:solidFill>
@@ -9021,14 +9266,14 @@
                   <a:tcPr/>
                 </a:tc>
               </a:tr>
-              <a:tr h="447040">
-                <a:tc>
-                  <a:txBody>
-                    <a:bodyPr/>
-                    <a:lstStyle/>
-                    <a:p>
-                      <a:r>
-                        <a:rPr sz="1000">
+              <a:tr h="268224">
+                <a:tc>
+                  <a:txBody>
+                    <a:bodyPr/>
+                    <a:lstStyle/>
+                    <a:p>
+                      <a:r>
+                        <a:rPr sz="1100">
                           <a:solidFill>
                             <a:srgbClr val="222222"/>
                           </a:solidFill>
@@ -9045,7 +9290,7 @@
                     <a:lstStyle/>
                     <a:p>
                       <a:r>
-                        <a:rPr sz="1000">
+                        <a:rPr sz="1100">
                           <a:solidFill>
                             <a:srgbClr val="222222"/>
                           </a:solidFill>
@@ -9062,24 +9307,7 @@
                     <a:lstStyle/>
                     <a:p>
                       <a:r>
-                        <a:rPr sz="1000">
-                          <a:solidFill>
-                            <a:srgbClr val="222222"/>
-                          </a:solidFill>
-                        </a:rPr>
-                        <a:t>11.1%</a:t>
-                      </a:r>
-                    </a:p>
-                  </a:txBody>
-                  <a:tcPr/>
-                </a:tc>
-                <a:tc>
-                  <a:txBody>
-                    <a:bodyPr/>
-                    <a:lstStyle/>
-                    <a:p>
-                      <a:r>
-                        <a:rPr sz="1000">
+                        <a:rPr sz="1100">
                           <a:solidFill>
                             <a:srgbClr val="222222"/>
                           </a:solidFill>
@@ -9091,14 +9319,14 @@
                   <a:tcPr/>
                 </a:tc>
               </a:tr>
-              <a:tr h="447040">
-                <a:tc>
-                  <a:txBody>
-                    <a:bodyPr/>
-                    <a:lstStyle/>
-                    <a:p>
-                      <a:r>
-                        <a:rPr sz="1000">
+              <a:tr h="268224">
+                <a:tc>
+                  <a:txBody>
+                    <a:bodyPr/>
+                    <a:lstStyle/>
+                    <a:p>
+                      <a:r>
+                        <a:rPr sz="1100">
                           <a:solidFill>
                             <a:srgbClr val="222222"/>
                           </a:solidFill>
@@ -9115,7 +9343,7 @@
                     <a:lstStyle/>
                     <a:p>
                       <a:r>
-                        <a:rPr sz="1000">
+                        <a:rPr sz="1100">
                           <a:solidFill>
                             <a:srgbClr val="222222"/>
                           </a:solidFill>
@@ -9132,24 +9360,7 @@
                     <a:lstStyle/>
                     <a:p>
                       <a:r>
-                        <a:rPr sz="1000">
-                          <a:solidFill>
-                            <a:srgbClr val="222222"/>
-                          </a:solidFill>
-                        </a:rPr>
-                        <a:t>0.0% / 100.0%</a:t>
-                      </a:r>
-                    </a:p>
-                  </a:txBody>
-                  <a:tcPr/>
-                </a:tc>
-                <a:tc>
-                  <a:txBody>
-                    <a:bodyPr/>
-                    <a:lstStyle/>
-                    <a:p>
-                      <a:r>
-                        <a:rPr sz="1000">
+                        <a:rPr sz="1100">
                           <a:solidFill>
                             <a:srgbClr val="222222"/>
                           </a:solidFill>
@@ -9161,14 +9372,14 @@
                   <a:tcPr/>
                 </a:tc>
               </a:tr>
-              <a:tr h="447040">
-                <a:tc>
-                  <a:txBody>
-                    <a:bodyPr/>
-                    <a:lstStyle/>
-                    <a:p>
-                      <a:r>
-                        <a:rPr sz="1000">
+              <a:tr h="268224">
+                <a:tc>
+                  <a:txBody>
+                    <a:bodyPr/>
+                    <a:lstStyle/>
+                    <a:p>
+                      <a:r>
+                        <a:rPr sz="1100">
                           <a:solidFill>
                             <a:srgbClr val="222222"/>
                           </a:solidFill>
@@ -9185,7 +9396,7 @@
                     <a:lstStyle/>
                     <a:p>
                       <a:r>
-                        <a:rPr sz="1000">
+                        <a:rPr sz="1100">
                           <a:solidFill>
                             <a:srgbClr val="222222"/>
                           </a:solidFill>
@@ -9202,7 +9413,7 @@
                     <a:lstStyle/>
                     <a:p>
                       <a:r>
-                        <a:rPr sz="1000">
+                        <a:rPr sz="1100">
                           <a:solidFill>
                             <a:srgbClr val="222222"/>
                           </a:solidFill>
@@ -9213,32 +9424,15 @@
                   </a:txBody>
                   <a:tcPr/>
                 </a:tc>
-                <a:tc>
-                  <a:txBody>
-                    <a:bodyPr/>
-                    <a:lstStyle/>
-                    <a:p>
-                      <a:r>
-                        <a:rPr sz="1000">
-                          <a:solidFill>
-                            <a:srgbClr val="222222"/>
-                          </a:solidFill>
-                        </a:rPr>
-                        <a:t>0.0%</a:t>
-                      </a:r>
-                    </a:p>
-                  </a:txBody>
-                  <a:tcPr/>
-                </a:tc>
               </a:tr>
-              <a:tr h="447040">
-                <a:tc>
-                  <a:txBody>
-                    <a:bodyPr/>
-                    <a:lstStyle/>
-                    <a:p>
-                      <a:r>
-                        <a:rPr sz="1000">
+              <a:tr h="268224">
+                <a:tc>
+                  <a:txBody>
+                    <a:bodyPr/>
+                    <a:lstStyle/>
+                    <a:p>
+                      <a:r>
+                        <a:rPr sz="1100">
                           <a:solidFill>
                             <a:srgbClr val="222222"/>
                           </a:solidFill>
@@ -9255,7 +9449,7 @@
                     <a:lstStyle/>
                     <a:p>
                       <a:r>
-                        <a:rPr sz="1000">
+                        <a:rPr sz="1100">
                           <a:solidFill>
                             <a:srgbClr val="222222"/>
                           </a:solidFill>
@@ -9272,24 +9466,7 @@
                     <a:lstStyle/>
                     <a:p>
                       <a:r>
-                        <a:rPr sz="1000">
-                          <a:solidFill>
-                            <a:srgbClr val="222222"/>
-                          </a:solidFill>
-                        </a:rPr>
-                        <a:t>0（不检索）</a:t>
-                      </a:r>
-                    </a:p>
-                  </a:txBody>
-                  <a:tcPr/>
-                </a:tc>
-                <a:tc>
-                  <a:txBody>
-                    <a:bodyPr/>
-                    <a:lstStyle/>
-                    <a:p>
-                      <a:r>
-                        <a:rPr sz="1000">
+                        <a:rPr sz="1100">
                           <a:solidFill>
                             <a:srgbClr val="222222"/>
                           </a:solidFill>
@@ -9301,14 +9478,14 @@
                   <a:tcPr/>
                 </a:tc>
               </a:tr>
-              <a:tr h="447040">
-                <a:tc>
-                  <a:txBody>
-                    <a:bodyPr/>
-                    <a:lstStyle/>
-                    <a:p>
-                      <a:r>
-                        <a:rPr sz="1000">
+              <a:tr h="268224">
+                <a:tc>
+                  <a:txBody>
+                    <a:bodyPr/>
+                    <a:lstStyle/>
+                    <a:p>
+                      <a:r>
+                        <a:rPr sz="1100">
                           <a:solidFill>
                             <a:srgbClr val="222222"/>
                           </a:solidFill>
@@ -9325,7 +9502,7 @@
                     <a:lstStyle/>
                     <a:p>
                       <a:r>
-                        <a:rPr sz="1000">
+                        <a:rPr sz="1100">
                           <a:solidFill>
                             <a:srgbClr val="222222"/>
                           </a:solidFill>
@@ -9342,24 +9519,7 @@
                     <a:lstStyle/>
                     <a:p>
                       <a:r>
-                        <a:rPr sz="1000">
-                          <a:solidFill>
-                            <a:srgbClr val="222222"/>
-                          </a:solidFill>
-                        </a:rPr>
-                        <a:t>0</a:t>
-                      </a:r>
-                    </a:p>
-                  </a:txBody>
-                  <a:tcPr/>
-                </a:tc>
-                <a:tc>
-                  <a:txBody>
-                    <a:bodyPr/>
-                    <a:lstStyle/>
-                    <a:p>
-                      <a:r>
-                        <a:rPr sz="1000">
+                        <a:rPr sz="1100">
                           <a:solidFill>
                             <a:srgbClr val="222222"/>
                           </a:solidFill>
@@ -9408,7 +9568,7 @@
                   <a:srgbClr val="5F6B7A"/>
                 </a:solidFill>
               </a:rPr>
-              <a:t>B0 与 B2 使用同一个模型，差异只来自方法：B0 无外部证据、B2 有检索与规则裁决。复跑命中缓存为 0 次计费调用。</a:t>
+              <a:t>B0 与 B1 使用同一个模型，差异只来自方法：B0 不给外部证据，B1 执行完整核验流程。复跑命中缓存为 0 次计费调用。</a:t>
             </a:r>
           </a:p>
         </p:txBody>
